--- a/public/fun/pack/pptx/talk/발표템플릿_04_모임·동호회소개_제주유채밭.pptx
+++ b/public/fun/pack/pptx/talk/발표템플릿_04_모임·동호회소개_제주유채밭.pptx
@@ -3347,7 +3347,7 @@
             <a:r>
               <a:rPr sz="3600" b="1" i="0">
                 <a:solidFill>
-                  <a:srgbClr val="605610"/>
+                  <a:srgbClr val="72671D"/>
                 </a:solidFill>
               </a:rPr>
               <a:t>발표 제목을 입력하세요</a:t>
@@ -3385,7 +3385,7 @@
             <a:r>
               <a:rPr sz="1700" b="0" i="1">
                 <a:solidFill>
-                  <a:srgbClr val="605610"/>
+                  <a:srgbClr val="72671D"/>
                 </a:solidFill>
               </a:rPr>
               <a:t>우리 모임을 처음 오신 분께 소개합니다</a:t>
@@ -3487,7 +3487,7 @@
             <a:avLst/>
           </a:prstGeom>
           <a:solidFill>
-            <a:srgbClr val="B8A41E"/>
+            <a:srgbClr val="DFC93A"/>
           </a:solidFill>
           <a:ln>
             <a:noFill/>
@@ -3556,11 +3556,11 @@
             </a:avLst>
           </a:prstGeom>
           <a:solidFill>
-            <a:srgbClr val="FCFAED"/>
+            <a:srgbClr val="FCFBF3"/>
           </a:solidFill>
           <a:ln w="12700">
             <a:solidFill>
-              <a:srgbClr val="F8F2C9"/>
+              <a:srgbClr val="F7F3D4"/>
             </a:solidFill>
           </a:ln>
         </p:spPr>
@@ -3587,7 +3587,7 @@
             <a:avLst/>
           </a:prstGeom>
           <a:solidFill>
-            <a:srgbClr val="B8A41E"/>
+            <a:srgbClr val="DFC93A"/>
           </a:solidFill>
           <a:ln>
             <a:noFill/>
@@ -3645,7 +3645,7 @@
             <a:r>
               <a:rPr sz="1800" b="1" i="0">
                 <a:solidFill>
-                  <a:srgbClr val="605610"/>
+                  <a:srgbClr val="72671D"/>
                 </a:solidFill>
               </a:rPr>
               <a:t>우리 모임 소개</a:t>
@@ -3708,11 +3708,11 @@
             </a:avLst>
           </a:prstGeom>
           <a:solidFill>
-            <a:srgbClr val="FCFAED"/>
+            <a:srgbClr val="FCFBF3"/>
           </a:solidFill>
           <a:ln w="12700">
             <a:solidFill>
-              <a:srgbClr val="F8F2C9"/>
+              <a:srgbClr val="F7F3D4"/>
             </a:solidFill>
           </a:ln>
         </p:spPr>
@@ -3739,7 +3739,7 @@
             <a:avLst/>
           </a:prstGeom>
           <a:solidFill>
-            <a:srgbClr val="B8A41E"/>
+            <a:srgbClr val="DFC93A"/>
           </a:solidFill>
           <a:ln>
             <a:noFill/>
@@ -3797,7 +3797,7 @@
             <a:r>
               <a:rPr sz="1800" b="1" i="0">
                 <a:solidFill>
-                  <a:srgbClr val="605610"/>
+                  <a:srgbClr val="72671D"/>
                 </a:solidFill>
               </a:rPr>
               <a:t>활동 이야기</a:t>
@@ -3860,11 +3860,11 @@
             </a:avLst>
           </a:prstGeom>
           <a:solidFill>
-            <a:srgbClr val="FCFAED"/>
+            <a:srgbClr val="FCFBF3"/>
           </a:solidFill>
           <a:ln w="12700">
             <a:solidFill>
-              <a:srgbClr val="F8F2C9"/>
+              <a:srgbClr val="F7F3D4"/>
             </a:solidFill>
           </a:ln>
         </p:spPr>
@@ -3891,7 +3891,7 @@
             <a:avLst/>
           </a:prstGeom>
           <a:solidFill>
-            <a:srgbClr val="B8A41E"/>
+            <a:srgbClr val="DFC93A"/>
           </a:solidFill>
           <a:ln>
             <a:noFill/>
@@ -3949,7 +3949,7 @@
             <a:r>
               <a:rPr sz="1800" b="1" i="0">
                 <a:solidFill>
-                  <a:srgbClr val="605610"/>
+                  <a:srgbClr val="72671D"/>
                 </a:solidFill>
               </a:rPr>
               <a:t>함께하는 사람들</a:t>
@@ -4012,11 +4012,11 @@
             </a:avLst>
           </a:prstGeom>
           <a:solidFill>
-            <a:srgbClr val="FCFAED"/>
+            <a:srgbClr val="FCFBF3"/>
           </a:solidFill>
           <a:ln w="12700">
             <a:solidFill>
-              <a:srgbClr val="F8F2C9"/>
+              <a:srgbClr val="F7F3D4"/>
             </a:solidFill>
           </a:ln>
         </p:spPr>
@@ -4043,7 +4043,7 @@
             <a:avLst/>
           </a:prstGeom>
           <a:solidFill>
-            <a:srgbClr val="B8A41E"/>
+            <a:srgbClr val="DFC93A"/>
           </a:solidFill>
           <a:ln>
             <a:noFill/>
@@ -4101,7 +4101,7 @@
             <a:r>
               <a:rPr sz="1800" b="1" i="0">
                 <a:solidFill>
-                  <a:srgbClr val="605610"/>
+                  <a:srgbClr val="72671D"/>
                 </a:solidFill>
               </a:rPr>
               <a:t>참여 방법</a:t>
@@ -4188,7 +4188,7 @@
             <a:avLst/>
           </a:prstGeom>
           <a:solidFill>
-            <a:srgbClr val="B8A41E"/>
+            <a:srgbClr val="DFC93A"/>
           </a:solidFill>
           <a:ln>
             <a:noFill/>
@@ -4270,7 +4270,7 @@
             <a:r>
               <a:rPr sz="2600" b="1" i="0">
                 <a:solidFill>
-                  <a:srgbClr val="605610"/>
+                  <a:srgbClr val="72671D"/>
                 </a:solidFill>
               </a:rPr>
               <a:t>한 문장으로 말하면 — 여기에 핵심 메시지를 입력하세요</a:t>
@@ -4295,11 +4295,11 @@
             </a:avLst>
           </a:prstGeom>
           <a:solidFill>
-            <a:srgbClr val="FCFAED"/>
+            <a:srgbClr val="FCFBF3"/>
           </a:solidFill>
           <a:ln w="15875">
             <a:solidFill>
-              <a:srgbClr val="F8F2C9"/>
+              <a:srgbClr val="F7F3D4"/>
             </a:solidFill>
           </a:ln>
         </p:spPr>
@@ -4326,7 +4326,7 @@
             <a:avLst/>
           </a:prstGeom>
           <a:solidFill>
-            <a:srgbClr val="B8A41E"/>
+            <a:srgbClr val="DFC93A"/>
           </a:solidFill>
           <a:ln>
             <a:noFill/>
@@ -4384,7 +4384,7 @@
             <a:r>
               <a:rPr sz="1800" b="1" i="0">
                 <a:solidFill>
-                  <a:srgbClr val="605610"/>
+                  <a:srgbClr val="72671D"/>
                 </a:solidFill>
               </a:rPr>
               <a:t>모임의 취지</a:t>
@@ -4462,11 +4462,11 @@
             </a:avLst>
           </a:prstGeom>
           <a:solidFill>
-            <a:srgbClr val="FCFAED"/>
+            <a:srgbClr val="FCFBF3"/>
           </a:solidFill>
           <a:ln w="15875">
             <a:solidFill>
-              <a:srgbClr val="F8F2C9"/>
+              <a:srgbClr val="F7F3D4"/>
             </a:solidFill>
           </a:ln>
         </p:spPr>
@@ -4493,7 +4493,7 @@
             <a:avLst/>
           </a:prstGeom>
           <a:solidFill>
-            <a:srgbClr val="B8A41E"/>
+            <a:srgbClr val="DFC93A"/>
           </a:solidFill>
           <a:ln>
             <a:noFill/>
@@ -4551,7 +4551,7 @@
             <a:r>
               <a:rPr sz="1800" b="1" i="0">
                 <a:solidFill>
-                  <a:srgbClr val="605610"/>
+                  <a:srgbClr val="72671D"/>
                 </a:solidFill>
               </a:rPr>
               <a:t>활동 내용</a:t>
@@ -4629,11 +4629,11 @@
             </a:avLst>
           </a:prstGeom>
           <a:solidFill>
-            <a:srgbClr val="FCFAED"/>
+            <a:srgbClr val="FCFBF3"/>
           </a:solidFill>
           <a:ln w="15875">
             <a:solidFill>
-              <a:srgbClr val="F8F2C9"/>
+              <a:srgbClr val="F7F3D4"/>
             </a:solidFill>
           </a:ln>
         </p:spPr>
@@ -4660,7 +4660,7 @@
             <a:avLst/>
           </a:prstGeom>
           <a:solidFill>
-            <a:srgbClr val="B8A41E"/>
+            <a:srgbClr val="DFC93A"/>
           </a:solidFill>
           <a:ln>
             <a:noFill/>
@@ -4718,7 +4718,7 @@
             <a:r>
               <a:rPr sz="1800" b="1" i="0">
                 <a:solidFill>
-                  <a:srgbClr val="605610"/>
+                  <a:srgbClr val="72671D"/>
                 </a:solidFill>
               </a:rPr>
               <a:t>참여 혜택</a:t>
@@ -4820,7 +4820,7 @@
             <a:avLst/>
           </a:prstGeom>
           <a:solidFill>
-            <a:srgbClr val="B8A41E"/>
+            <a:srgbClr val="DFC93A"/>
           </a:solidFill>
           <a:ln>
             <a:noFill/>
@@ -4889,11 +4889,11 @@
             </a:avLst>
           </a:prstGeom>
           <a:solidFill>
-            <a:srgbClr val="FCFAED"/>
+            <a:srgbClr val="FCFBF3"/>
           </a:solidFill>
           <a:ln w="12700">
             <a:solidFill>
-              <a:srgbClr val="F8F2C9"/>
+              <a:srgbClr val="F7F3D4"/>
             </a:solidFill>
           </a:ln>
         </p:spPr>
@@ -4922,7 +4922,7 @@
             </a:avLst>
           </a:prstGeom>
           <a:solidFill>
-            <a:srgbClr val="B8A41E"/>
+            <a:srgbClr val="DFC93A"/>
           </a:solidFill>
           <a:ln>
             <a:noFill/>
@@ -5074,11 +5074,11 @@
             </a:avLst>
           </a:prstGeom>
           <a:solidFill>
-            <a:srgbClr val="F8F2C9"/>
+            <a:srgbClr val="F7F3D4"/>
           </a:solidFill>
           <a:ln w="12700">
             <a:solidFill>
-              <a:srgbClr val="F8F2C9"/>
+              <a:srgbClr val="F7F3D4"/>
             </a:solidFill>
           </a:ln>
         </p:spPr>
@@ -5107,7 +5107,7 @@
             </a:avLst>
           </a:prstGeom>
           <a:solidFill>
-            <a:srgbClr val="605610"/>
+            <a:srgbClr val="72671D"/>
           </a:solidFill>
           <a:ln>
             <a:noFill/>
@@ -5283,7 +5283,7 @@
             <a:avLst/>
           </a:prstGeom>
           <a:solidFill>
-            <a:srgbClr val="B8A41E"/>
+            <a:srgbClr val="DFC93A"/>
           </a:solidFill>
           <a:ln>
             <a:noFill/>
@@ -5379,30 +5379,30 @@
                   <a:tcPr anchor="ctr" marL="73152" marR="73152">
                     <a:lnL w="9525" cap="flat" cmpd="sng" algn="ctr">
                       <a:solidFill>
-                        <a:srgbClr val="B8A41E"/>
+                        <a:srgbClr val="DFC93A"/>
                       </a:solidFill>
                       <a:prstDash val="solid"/>
                     </a:lnL>
                     <a:lnR w="9525" cap="flat" cmpd="sng" algn="ctr">
                       <a:solidFill>
-                        <a:srgbClr val="B8A41E"/>
+                        <a:srgbClr val="DFC93A"/>
                       </a:solidFill>
                       <a:prstDash val="solid"/>
                     </a:lnR>
                     <a:lnT w="9525" cap="flat" cmpd="sng" algn="ctr">
                       <a:solidFill>
-                        <a:srgbClr val="B8A41E"/>
+                        <a:srgbClr val="DFC93A"/>
                       </a:solidFill>
                       <a:prstDash val="solid"/>
                     </a:lnT>
                     <a:lnB w="9525" cap="flat" cmpd="sng" algn="ctr">
                       <a:solidFill>
-                        <a:srgbClr val="B8A41E"/>
+                        <a:srgbClr val="DFC93A"/>
                       </a:solidFill>
                       <a:prstDash val="solid"/>
                     </a:lnB>
                     <a:solidFill>
-                      <a:srgbClr val="B8A41E"/>
+                      <a:srgbClr val="DFC93A"/>
                     </a:solidFill>
                   </a:tcPr>
                 </a:tc>
@@ -5425,30 +5425,30 @@
                   <a:tcPr anchor="ctr" marL="73152" marR="73152">
                     <a:lnL w="9525" cap="flat" cmpd="sng" algn="ctr">
                       <a:solidFill>
-                        <a:srgbClr val="B8A41E"/>
+                        <a:srgbClr val="DFC93A"/>
                       </a:solidFill>
                       <a:prstDash val="solid"/>
                     </a:lnL>
                     <a:lnR w="9525" cap="flat" cmpd="sng" algn="ctr">
                       <a:solidFill>
-                        <a:srgbClr val="B8A41E"/>
+                        <a:srgbClr val="DFC93A"/>
                       </a:solidFill>
                       <a:prstDash val="solid"/>
                     </a:lnR>
                     <a:lnT w="9525" cap="flat" cmpd="sng" algn="ctr">
                       <a:solidFill>
-                        <a:srgbClr val="B8A41E"/>
+                        <a:srgbClr val="DFC93A"/>
                       </a:solidFill>
                       <a:prstDash val="solid"/>
                     </a:lnT>
                     <a:lnB w="9525" cap="flat" cmpd="sng" algn="ctr">
                       <a:solidFill>
-                        <a:srgbClr val="B8A41E"/>
+                        <a:srgbClr val="DFC93A"/>
                       </a:solidFill>
                       <a:prstDash val="solid"/>
                     </a:lnB>
                     <a:solidFill>
-                      <a:srgbClr val="B8A41E"/>
+                      <a:srgbClr val="DFC93A"/>
                     </a:solidFill>
                   </a:tcPr>
                 </a:tc>
@@ -5471,30 +5471,30 @@
                   <a:tcPr anchor="ctr" marL="73152" marR="73152">
                     <a:lnL w="9525" cap="flat" cmpd="sng" algn="ctr">
                       <a:solidFill>
-                        <a:srgbClr val="B8A41E"/>
+                        <a:srgbClr val="DFC93A"/>
                       </a:solidFill>
                       <a:prstDash val="solid"/>
                     </a:lnL>
                     <a:lnR w="9525" cap="flat" cmpd="sng" algn="ctr">
                       <a:solidFill>
-                        <a:srgbClr val="B8A41E"/>
+                        <a:srgbClr val="DFC93A"/>
                       </a:solidFill>
                       <a:prstDash val="solid"/>
                     </a:lnR>
                     <a:lnT w="9525" cap="flat" cmpd="sng" algn="ctr">
                       <a:solidFill>
-                        <a:srgbClr val="B8A41E"/>
+                        <a:srgbClr val="DFC93A"/>
                       </a:solidFill>
                       <a:prstDash val="solid"/>
                     </a:lnT>
                     <a:lnB w="9525" cap="flat" cmpd="sng" algn="ctr">
                       <a:solidFill>
-                        <a:srgbClr val="B8A41E"/>
+                        <a:srgbClr val="DFC93A"/>
                       </a:solidFill>
                       <a:prstDash val="solid"/>
                     </a:lnB>
                     <a:solidFill>
-                      <a:srgbClr val="B8A41E"/>
+                      <a:srgbClr val="DFC93A"/>
                     </a:solidFill>
                   </a:tcPr>
                 </a:tc>
@@ -5517,30 +5517,30 @@
                   <a:tcPr anchor="ctr" marL="73152" marR="73152">
                     <a:lnL w="9525" cap="flat" cmpd="sng" algn="ctr">
                       <a:solidFill>
-                        <a:srgbClr val="B8A41E"/>
+                        <a:srgbClr val="DFC93A"/>
                       </a:solidFill>
                       <a:prstDash val="solid"/>
                     </a:lnL>
                     <a:lnR w="9525" cap="flat" cmpd="sng" algn="ctr">
                       <a:solidFill>
-                        <a:srgbClr val="B8A41E"/>
+                        <a:srgbClr val="DFC93A"/>
                       </a:solidFill>
                       <a:prstDash val="solid"/>
                     </a:lnR>
                     <a:lnT w="9525" cap="flat" cmpd="sng" algn="ctr">
                       <a:solidFill>
-                        <a:srgbClr val="B8A41E"/>
+                        <a:srgbClr val="DFC93A"/>
                       </a:solidFill>
                       <a:prstDash val="solid"/>
                     </a:lnT>
                     <a:lnB w="9525" cap="flat" cmpd="sng" algn="ctr">
                       <a:solidFill>
-                        <a:srgbClr val="B8A41E"/>
+                        <a:srgbClr val="DFC93A"/>
                       </a:solidFill>
                       <a:prstDash val="solid"/>
                     </a:lnB>
                     <a:solidFill>
-                      <a:srgbClr val="B8A41E"/>
+                      <a:srgbClr val="DFC93A"/>
                     </a:solidFill>
                   </a:tcPr>
                 </a:tc>
@@ -5555,7 +5555,7 @@
                       <a:r>
                         <a:rPr sz="1500" b="1">
                           <a:solidFill>
-                            <a:srgbClr val="605610"/>
+                            <a:srgbClr val="72671D"/>
                           </a:solidFill>
                         </a:rPr>
                         <a:t>1</a:t>
@@ -5565,30 +5565,30 @@
                   <a:tcPr anchor="ctr" marL="73152" marR="73152">
                     <a:lnL w="9525" cap="flat" cmpd="sng" algn="ctr">
                       <a:solidFill>
-                        <a:srgbClr val="F8F2C9"/>
+                        <a:srgbClr val="F7F3D4"/>
                       </a:solidFill>
                       <a:prstDash val="solid"/>
                     </a:lnL>
                     <a:lnR w="9525" cap="flat" cmpd="sng" algn="ctr">
                       <a:solidFill>
-                        <a:srgbClr val="F8F2C9"/>
+                        <a:srgbClr val="F7F3D4"/>
                       </a:solidFill>
                       <a:prstDash val="solid"/>
                     </a:lnR>
                     <a:lnT w="9525" cap="flat" cmpd="sng" algn="ctr">
                       <a:solidFill>
-                        <a:srgbClr val="F8F2C9"/>
+                        <a:srgbClr val="F7F3D4"/>
                       </a:solidFill>
                       <a:prstDash val="solid"/>
                     </a:lnT>
                     <a:lnB w="9525" cap="flat" cmpd="sng" algn="ctr">
                       <a:solidFill>
-                        <a:srgbClr val="F8F2C9"/>
+                        <a:srgbClr val="F7F3D4"/>
                       </a:solidFill>
                       <a:prstDash val="solid"/>
                     </a:lnB>
                     <a:solidFill>
-                      <a:srgbClr val="F8F2C9"/>
+                      <a:srgbClr val="F7F3D4"/>
                     </a:solidFill>
                   </a:tcPr>
                 </a:tc>
@@ -5611,25 +5611,25 @@
                   <a:tcPr anchor="ctr" marL="73152" marR="73152">
                     <a:lnL w="9525" cap="flat" cmpd="sng" algn="ctr">
                       <a:solidFill>
-                        <a:srgbClr val="F8F2C9"/>
+                        <a:srgbClr val="F7F3D4"/>
                       </a:solidFill>
                       <a:prstDash val="solid"/>
                     </a:lnL>
                     <a:lnR w="9525" cap="flat" cmpd="sng" algn="ctr">
                       <a:solidFill>
-                        <a:srgbClr val="F8F2C9"/>
+                        <a:srgbClr val="F7F3D4"/>
                       </a:solidFill>
                       <a:prstDash val="solid"/>
                     </a:lnR>
                     <a:lnT w="9525" cap="flat" cmpd="sng" algn="ctr">
                       <a:solidFill>
-                        <a:srgbClr val="F8F2C9"/>
+                        <a:srgbClr val="F7F3D4"/>
                       </a:solidFill>
                       <a:prstDash val="solid"/>
                     </a:lnT>
                     <a:lnB w="9525" cap="flat" cmpd="sng" algn="ctr">
                       <a:solidFill>
-                        <a:srgbClr val="F8F2C9"/>
+                        <a:srgbClr val="F7F3D4"/>
                       </a:solidFill>
                       <a:prstDash val="solid"/>
                     </a:lnB>
@@ -5657,25 +5657,25 @@
                   <a:tcPr anchor="ctr" marL="73152" marR="73152">
                     <a:lnL w="9525" cap="flat" cmpd="sng" algn="ctr">
                       <a:solidFill>
-                        <a:srgbClr val="F8F2C9"/>
+                        <a:srgbClr val="F7F3D4"/>
                       </a:solidFill>
                       <a:prstDash val="solid"/>
                     </a:lnL>
                     <a:lnR w="9525" cap="flat" cmpd="sng" algn="ctr">
                       <a:solidFill>
-                        <a:srgbClr val="F8F2C9"/>
+                        <a:srgbClr val="F7F3D4"/>
                       </a:solidFill>
                       <a:prstDash val="solid"/>
                     </a:lnR>
                     <a:lnT w="9525" cap="flat" cmpd="sng" algn="ctr">
                       <a:solidFill>
-                        <a:srgbClr val="F8F2C9"/>
+                        <a:srgbClr val="F7F3D4"/>
                       </a:solidFill>
                       <a:prstDash val="solid"/>
                     </a:lnT>
                     <a:lnB w="9525" cap="flat" cmpd="sng" algn="ctr">
                       <a:solidFill>
-                        <a:srgbClr val="F8F2C9"/>
+                        <a:srgbClr val="F7F3D4"/>
                       </a:solidFill>
                       <a:prstDash val="solid"/>
                     </a:lnB>
@@ -5703,25 +5703,25 @@
                   <a:tcPr anchor="ctr" marL="73152" marR="73152">
                     <a:lnL w="9525" cap="flat" cmpd="sng" algn="ctr">
                       <a:solidFill>
-                        <a:srgbClr val="F8F2C9"/>
+                        <a:srgbClr val="F7F3D4"/>
                       </a:solidFill>
                       <a:prstDash val="solid"/>
                     </a:lnL>
                     <a:lnR w="9525" cap="flat" cmpd="sng" algn="ctr">
                       <a:solidFill>
-                        <a:srgbClr val="F8F2C9"/>
+                        <a:srgbClr val="F7F3D4"/>
                       </a:solidFill>
                       <a:prstDash val="solid"/>
                     </a:lnR>
                     <a:lnT w="9525" cap="flat" cmpd="sng" algn="ctr">
                       <a:solidFill>
-                        <a:srgbClr val="F8F2C9"/>
+                        <a:srgbClr val="F7F3D4"/>
                       </a:solidFill>
                       <a:prstDash val="solid"/>
                     </a:lnT>
                     <a:lnB w="9525" cap="flat" cmpd="sng" algn="ctr">
                       <a:solidFill>
-                        <a:srgbClr val="F8F2C9"/>
+                        <a:srgbClr val="F7F3D4"/>
                       </a:solidFill>
                       <a:prstDash val="solid"/>
                     </a:lnB>
@@ -5741,7 +5741,7 @@
                       <a:r>
                         <a:rPr sz="1500" b="1">
                           <a:solidFill>
-                            <a:srgbClr val="605610"/>
+                            <a:srgbClr val="72671D"/>
                           </a:solidFill>
                         </a:rPr>
                         <a:t>2</a:t>
@@ -5751,30 +5751,30 @@
                   <a:tcPr anchor="ctr" marL="73152" marR="73152">
                     <a:lnL w="9525" cap="flat" cmpd="sng" algn="ctr">
                       <a:solidFill>
-                        <a:srgbClr val="F8F2C9"/>
+                        <a:srgbClr val="F7F3D4"/>
                       </a:solidFill>
                       <a:prstDash val="solid"/>
                     </a:lnL>
                     <a:lnR w="9525" cap="flat" cmpd="sng" algn="ctr">
                       <a:solidFill>
-                        <a:srgbClr val="F8F2C9"/>
+                        <a:srgbClr val="F7F3D4"/>
                       </a:solidFill>
                       <a:prstDash val="solid"/>
                     </a:lnR>
                     <a:lnT w="9525" cap="flat" cmpd="sng" algn="ctr">
                       <a:solidFill>
-                        <a:srgbClr val="F8F2C9"/>
+                        <a:srgbClr val="F7F3D4"/>
                       </a:solidFill>
                       <a:prstDash val="solid"/>
                     </a:lnT>
                     <a:lnB w="9525" cap="flat" cmpd="sng" algn="ctr">
                       <a:solidFill>
-                        <a:srgbClr val="F8F2C9"/>
+                        <a:srgbClr val="F7F3D4"/>
                       </a:solidFill>
                       <a:prstDash val="solid"/>
                     </a:lnB>
                     <a:solidFill>
-                      <a:srgbClr val="F8F2C9"/>
+                      <a:srgbClr val="F7F3D4"/>
                     </a:solidFill>
                   </a:tcPr>
                 </a:tc>
@@ -5797,30 +5797,30 @@
                   <a:tcPr anchor="ctr" marL="73152" marR="73152">
                     <a:lnL w="9525" cap="flat" cmpd="sng" algn="ctr">
                       <a:solidFill>
-                        <a:srgbClr val="F8F2C9"/>
+                        <a:srgbClr val="F7F3D4"/>
                       </a:solidFill>
                       <a:prstDash val="solid"/>
                     </a:lnL>
                     <a:lnR w="9525" cap="flat" cmpd="sng" algn="ctr">
                       <a:solidFill>
-                        <a:srgbClr val="F8F2C9"/>
+                        <a:srgbClr val="F7F3D4"/>
                       </a:solidFill>
                       <a:prstDash val="solid"/>
                     </a:lnR>
                     <a:lnT w="9525" cap="flat" cmpd="sng" algn="ctr">
                       <a:solidFill>
-                        <a:srgbClr val="F8F2C9"/>
+                        <a:srgbClr val="F7F3D4"/>
                       </a:solidFill>
                       <a:prstDash val="solid"/>
                     </a:lnT>
                     <a:lnB w="9525" cap="flat" cmpd="sng" algn="ctr">
                       <a:solidFill>
-                        <a:srgbClr val="F8F2C9"/>
+                        <a:srgbClr val="F7F3D4"/>
                       </a:solidFill>
                       <a:prstDash val="solid"/>
                     </a:lnB>
                     <a:solidFill>
-                      <a:srgbClr val="FCFAED"/>
+                      <a:srgbClr val="FCFBF3"/>
                     </a:solidFill>
                   </a:tcPr>
                 </a:tc>
@@ -5843,30 +5843,30 @@
                   <a:tcPr anchor="ctr" marL="73152" marR="73152">
                     <a:lnL w="9525" cap="flat" cmpd="sng" algn="ctr">
                       <a:solidFill>
-                        <a:srgbClr val="F8F2C9"/>
+                        <a:srgbClr val="F7F3D4"/>
                       </a:solidFill>
                       <a:prstDash val="solid"/>
                     </a:lnL>
                     <a:lnR w="9525" cap="flat" cmpd="sng" algn="ctr">
                       <a:solidFill>
-                        <a:srgbClr val="F8F2C9"/>
+                        <a:srgbClr val="F7F3D4"/>
                       </a:solidFill>
                       <a:prstDash val="solid"/>
                     </a:lnR>
                     <a:lnT w="9525" cap="flat" cmpd="sng" algn="ctr">
                       <a:solidFill>
-                        <a:srgbClr val="F8F2C9"/>
+                        <a:srgbClr val="F7F3D4"/>
                       </a:solidFill>
                       <a:prstDash val="solid"/>
                     </a:lnT>
                     <a:lnB w="9525" cap="flat" cmpd="sng" algn="ctr">
                       <a:solidFill>
-                        <a:srgbClr val="F8F2C9"/>
+                        <a:srgbClr val="F7F3D4"/>
                       </a:solidFill>
                       <a:prstDash val="solid"/>
                     </a:lnB>
                     <a:solidFill>
-                      <a:srgbClr val="FCFAED"/>
+                      <a:srgbClr val="FCFBF3"/>
                     </a:solidFill>
                   </a:tcPr>
                 </a:tc>
@@ -5889,30 +5889,30 @@
                   <a:tcPr anchor="ctr" marL="73152" marR="73152">
                     <a:lnL w="9525" cap="flat" cmpd="sng" algn="ctr">
                       <a:solidFill>
-                        <a:srgbClr val="F8F2C9"/>
+                        <a:srgbClr val="F7F3D4"/>
                       </a:solidFill>
                       <a:prstDash val="solid"/>
                     </a:lnL>
                     <a:lnR w="9525" cap="flat" cmpd="sng" algn="ctr">
                       <a:solidFill>
-                        <a:srgbClr val="F8F2C9"/>
+                        <a:srgbClr val="F7F3D4"/>
                       </a:solidFill>
                       <a:prstDash val="solid"/>
                     </a:lnR>
                     <a:lnT w="9525" cap="flat" cmpd="sng" algn="ctr">
                       <a:solidFill>
-                        <a:srgbClr val="F8F2C9"/>
+                        <a:srgbClr val="F7F3D4"/>
                       </a:solidFill>
                       <a:prstDash val="solid"/>
                     </a:lnT>
                     <a:lnB w="9525" cap="flat" cmpd="sng" algn="ctr">
                       <a:solidFill>
-                        <a:srgbClr val="F8F2C9"/>
+                        <a:srgbClr val="F7F3D4"/>
                       </a:solidFill>
                       <a:prstDash val="solid"/>
                     </a:lnB>
                     <a:solidFill>
-                      <a:srgbClr val="FCFAED"/>
+                      <a:srgbClr val="FCFBF3"/>
                     </a:solidFill>
                   </a:tcPr>
                 </a:tc>
@@ -5927,7 +5927,7 @@
                       <a:r>
                         <a:rPr sz="1500" b="1">
                           <a:solidFill>
-                            <a:srgbClr val="605610"/>
+                            <a:srgbClr val="72671D"/>
                           </a:solidFill>
                         </a:rPr>
                         <a:t>3</a:t>
@@ -5937,30 +5937,30 @@
                   <a:tcPr anchor="ctr" marL="73152" marR="73152">
                     <a:lnL w="9525" cap="flat" cmpd="sng" algn="ctr">
                       <a:solidFill>
-                        <a:srgbClr val="F8F2C9"/>
+                        <a:srgbClr val="F7F3D4"/>
                       </a:solidFill>
                       <a:prstDash val="solid"/>
                     </a:lnL>
                     <a:lnR w="9525" cap="flat" cmpd="sng" algn="ctr">
                       <a:solidFill>
-                        <a:srgbClr val="F8F2C9"/>
+                        <a:srgbClr val="F7F3D4"/>
                       </a:solidFill>
                       <a:prstDash val="solid"/>
                     </a:lnR>
                     <a:lnT w="9525" cap="flat" cmpd="sng" algn="ctr">
                       <a:solidFill>
-                        <a:srgbClr val="F8F2C9"/>
+                        <a:srgbClr val="F7F3D4"/>
                       </a:solidFill>
                       <a:prstDash val="solid"/>
                     </a:lnT>
                     <a:lnB w="9525" cap="flat" cmpd="sng" algn="ctr">
                       <a:solidFill>
-                        <a:srgbClr val="F8F2C9"/>
+                        <a:srgbClr val="F7F3D4"/>
                       </a:solidFill>
                       <a:prstDash val="solid"/>
                     </a:lnB>
                     <a:solidFill>
-                      <a:srgbClr val="F8F2C9"/>
+                      <a:srgbClr val="F7F3D4"/>
                     </a:solidFill>
                   </a:tcPr>
                 </a:tc>
@@ -5983,25 +5983,25 @@
                   <a:tcPr anchor="ctr" marL="73152" marR="73152">
                     <a:lnL w="9525" cap="flat" cmpd="sng" algn="ctr">
                       <a:solidFill>
-                        <a:srgbClr val="F8F2C9"/>
+                        <a:srgbClr val="F7F3D4"/>
                       </a:solidFill>
                       <a:prstDash val="solid"/>
                     </a:lnL>
                     <a:lnR w="9525" cap="flat" cmpd="sng" algn="ctr">
                       <a:solidFill>
-                        <a:srgbClr val="F8F2C9"/>
+                        <a:srgbClr val="F7F3D4"/>
                       </a:solidFill>
                       <a:prstDash val="solid"/>
                     </a:lnR>
                     <a:lnT w="9525" cap="flat" cmpd="sng" algn="ctr">
                       <a:solidFill>
-                        <a:srgbClr val="F8F2C9"/>
+                        <a:srgbClr val="F7F3D4"/>
                       </a:solidFill>
                       <a:prstDash val="solid"/>
                     </a:lnT>
                     <a:lnB w="9525" cap="flat" cmpd="sng" algn="ctr">
                       <a:solidFill>
-                        <a:srgbClr val="F8F2C9"/>
+                        <a:srgbClr val="F7F3D4"/>
                       </a:solidFill>
                       <a:prstDash val="solid"/>
                     </a:lnB>
@@ -6029,25 +6029,25 @@
                   <a:tcPr anchor="ctr" marL="73152" marR="73152">
                     <a:lnL w="9525" cap="flat" cmpd="sng" algn="ctr">
                       <a:solidFill>
-                        <a:srgbClr val="F8F2C9"/>
+                        <a:srgbClr val="F7F3D4"/>
                       </a:solidFill>
                       <a:prstDash val="solid"/>
                     </a:lnL>
                     <a:lnR w="9525" cap="flat" cmpd="sng" algn="ctr">
                       <a:solidFill>
-                        <a:srgbClr val="F8F2C9"/>
+                        <a:srgbClr val="F7F3D4"/>
                       </a:solidFill>
                       <a:prstDash val="solid"/>
                     </a:lnR>
                     <a:lnT w="9525" cap="flat" cmpd="sng" algn="ctr">
                       <a:solidFill>
-                        <a:srgbClr val="F8F2C9"/>
+                        <a:srgbClr val="F7F3D4"/>
                       </a:solidFill>
                       <a:prstDash val="solid"/>
                     </a:lnT>
                     <a:lnB w="9525" cap="flat" cmpd="sng" algn="ctr">
                       <a:solidFill>
-                        <a:srgbClr val="F8F2C9"/>
+                        <a:srgbClr val="F7F3D4"/>
                       </a:solidFill>
                       <a:prstDash val="solid"/>
                     </a:lnB>
@@ -6075,25 +6075,25 @@
                   <a:tcPr anchor="ctr" marL="73152" marR="73152">
                     <a:lnL w="9525" cap="flat" cmpd="sng" algn="ctr">
                       <a:solidFill>
-                        <a:srgbClr val="F8F2C9"/>
+                        <a:srgbClr val="F7F3D4"/>
                       </a:solidFill>
                       <a:prstDash val="solid"/>
                     </a:lnL>
                     <a:lnR w="9525" cap="flat" cmpd="sng" algn="ctr">
                       <a:solidFill>
-                        <a:srgbClr val="F8F2C9"/>
+                        <a:srgbClr val="F7F3D4"/>
                       </a:solidFill>
                       <a:prstDash val="solid"/>
                     </a:lnR>
                     <a:lnT w="9525" cap="flat" cmpd="sng" algn="ctr">
                       <a:solidFill>
-                        <a:srgbClr val="F8F2C9"/>
+                        <a:srgbClr val="F7F3D4"/>
                       </a:solidFill>
                       <a:prstDash val="solid"/>
                     </a:lnT>
                     <a:lnB w="9525" cap="flat" cmpd="sng" algn="ctr">
                       <a:solidFill>
-                        <a:srgbClr val="F8F2C9"/>
+                        <a:srgbClr val="F7F3D4"/>
                       </a:solidFill>
                       <a:prstDash val="solid"/>
                     </a:lnB>
@@ -6113,7 +6113,7 @@
                       <a:r>
                         <a:rPr sz="1500" b="1">
                           <a:solidFill>
-                            <a:srgbClr val="605610"/>
+                            <a:srgbClr val="72671D"/>
                           </a:solidFill>
                         </a:rPr>
                         <a:t>4</a:t>
@@ -6123,30 +6123,30 @@
                   <a:tcPr anchor="ctr" marL="73152" marR="73152">
                     <a:lnL w="9525" cap="flat" cmpd="sng" algn="ctr">
                       <a:solidFill>
-                        <a:srgbClr val="F8F2C9"/>
+                        <a:srgbClr val="F7F3D4"/>
                       </a:solidFill>
                       <a:prstDash val="solid"/>
                     </a:lnL>
                     <a:lnR w="9525" cap="flat" cmpd="sng" algn="ctr">
                       <a:solidFill>
-                        <a:srgbClr val="F8F2C9"/>
+                        <a:srgbClr val="F7F3D4"/>
                       </a:solidFill>
                       <a:prstDash val="solid"/>
                     </a:lnR>
                     <a:lnT w="9525" cap="flat" cmpd="sng" algn="ctr">
                       <a:solidFill>
-                        <a:srgbClr val="F8F2C9"/>
+                        <a:srgbClr val="F7F3D4"/>
                       </a:solidFill>
                       <a:prstDash val="solid"/>
                     </a:lnT>
                     <a:lnB w="9525" cap="flat" cmpd="sng" algn="ctr">
                       <a:solidFill>
-                        <a:srgbClr val="F8F2C9"/>
+                        <a:srgbClr val="F7F3D4"/>
                       </a:solidFill>
                       <a:prstDash val="solid"/>
                     </a:lnB>
                     <a:solidFill>
-                      <a:srgbClr val="F8F2C9"/>
+                      <a:srgbClr val="F7F3D4"/>
                     </a:solidFill>
                   </a:tcPr>
                 </a:tc>
@@ -6169,30 +6169,30 @@
                   <a:tcPr anchor="ctr" marL="73152" marR="73152">
                     <a:lnL w="9525" cap="flat" cmpd="sng" algn="ctr">
                       <a:solidFill>
-                        <a:srgbClr val="F8F2C9"/>
+                        <a:srgbClr val="F7F3D4"/>
                       </a:solidFill>
                       <a:prstDash val="solid"/>
                     </a:lnL>
                     <a:lnR w="9525" cap="flat" cmpd="sng" algn="ctr">
                       <a:solidFill>
-                        <a:srgbClr val="F8F2C9"/>
+                        <a:srgbClr val="F7F3D4"/>
                       </a:solidFill>
                       <a:prstDash val="solid"/>
                     </a:lnR>
                     <a:lnT w="9525" cap="flat" cmpd="sng" algn="ctr">
                       <a:solidFill>
-                        <a:srgbClr val="F8F2C9"/>
+                        <a:srgbClr val="F7F3D4"/>
                       </a:solidFill>
                       <a:prstDash val="solid"/>
                     </a:lnT>
                     <a:lnB w="9525" cap="flat" cmpd="sng" algn="ctr">
                       <a:solidFill>
-                        <a:srgbClr val="F8F2C9"/>
+                        <a:srgbClr val="F7F3D4"/>
                       </a:solidFill>
                       <a:prstDash val="solid"/>
                     </a:lnB>
                     <a:solidFill>
-                      <a:srgbClr val="FCFAED"/>
+                      <a:srgbClr val="FCFBF3"/>
                     </a:solidFill>
                   </a:tcPr>
                 </a:tc>
@@ -6215,30 +6215,30 @@
                   <a:tcPr anchor="ctr" marL="73152" marR="73152">
                     <a:lnL w="9525" cap="flat" cmpd="sng" algn="ctr">
                       <a:solidFill>
-                        <a:srgbClr val="F8F2C9"/>
+                        <a:srgbClr val="F7F3D4"/>
                       </a:solidFill>
                       <a:prstDash val="solid"/>
                     </a:lnL>
                     <a:lnR w="9525" cap="flat" cmpd="sng" algn="ctr">
                       <a:solidFill>
-                        <a:srgbClr val="F8F2C9"/>
+                        <a:srgbClr val="F7F3D4"/>
                       </a:solidFill>
                       <a:prstDash val="solid"/>
                     </a:lnR>
                     <a:lnT w="9525" cap="flat" cmpd="sng" algn="ctr">
                       <a:solidFill>
-                        <a:srgbClr val="F8F2C9"/>
+                        <a:srgbClr val="F7F3D4"/>
                       </a:solidFill>
                       <a:prstDash val="solid"/>
                     </a:lnT>
                     <a:lnB w="9525" cap="flat" cmpd="sng" algn="ctr">
                       <a:solidFill>
-                        <a:srgbClr val="F8F2C9"/>
+                        <a:srgbClr val="F7F3D4"/>
                       </a:solidFill>
                       <a:prstDash val="solid"/>
                     </a:lnB>
                     <a:solidFill>
-                      <a:srgbClr val="FCFAED"/>
+                      <a:srgbClr val="FCFBF3"/>
                     </a:solidFill>
                   </a:tcPr>
                 </a:tc>
@@ -6261,30 +6261,30 @@
                   <a:tcPr anchor="ctr" marL="73152" marR="73152">
                     <a:lnL w="9525" cap="flat" cmpd="sng" algn="ctr">
                       <a:solidFill>
-                        <a:srgbClr val="F8F2C9"/>
+                        <a:srgbClr val="F7F3D4"/>
                       </a:solidFill>
                       <a:prstDash val="solid"/>
                     </a:lnL>
                     <a:lnR w="9525" cap="flat" cmpd="sng" algn="ctr">
                       <a:solidFill>
-                        <a:srgbClr val="F8F2C9"/>
+                        <a:srgbClr val="F7F3D4"/>
                       </a:solidFill>
                       <a:prstDash val="solid"/>
                     </a:lnR>
                     <a:lnT w="9525" cap="flat" cmpd="sng" algn="ctr">
                       <a:solidFill>
-                        <a:srgbClr val="F8F2C9"/>
+                        <a:srgbClr val="F7F3D4"/>
                       </a:solidFill>
                       <a:prstDash val="solid"/>
                     </a:lnT>
                     <a:lnB w="9525" cap="flat" cmpd="sng" algn="ctr">
                       <a:solidFill>
-                        <a:srgbClr val="F8F2C9"/>
+                        <a:srgbClr val="F7F3D4"/>
                       </a:solidFill>
                       <a:prstDash val="solid"/>
                     </a:lnB>
                     <a:solidFill>
-                      <a:srgbClr val="FCFAED"/>
+                      <a:srgbClr val="FCFBF3"/>
                     </a:solidFill>
                   </a:tcPr>
                 </a:tc>
@@ -6299,7 +6299,7 @@
                       <a:r>
                         <a:rPr sz="1500" b="1">
                           <a:solidFill>
-                            <a:srgbClr val="605610"/>
+                            <a:srgbClr val="72671D"/>
                           </a:solidFill>
                         </a:rPr>
                         <a:t>5</a:t>
@@ -6309,30 +6309,30 @@
                   <a:tcPr anchor="ctr" marL="73152" marR="73152">
                     <a:lnL w="9525" cap="flat" cmpd="sng" algn="ctr">
                       <a:solidFill>
-                        <a:srgbClr val="F8F2C9"/>
+                        <a:srgbClr val="F7F3D4"/>
                       </a:solidFill>
                       <a:prstDash val="solid"/>
                     </a:lnL>
                     <a:lnR w="9525" cap="flat" cmpd="sng" algn="ctr">
                       <a:solidFill>
-                        <a:srgbClr val="F8F2C9"/>
+                        <a:srgbClr val="F7F3D4"/>
                       </a:solidFill>
                       <a:prstDash val="solid"/>
                     </a:lnR>
                     <a:lnT w="9525" cap="flat" cmpd="sng" algn="ctr">
                       <a:solidFill>
-                        <a:srgbClr val="F8F2C9"/>
+                        <a:srgbClr val="F7F3D4"/>
                       </a:solidFill>
                       <a:prstDash val="solid"/>
                     </a:lnT>
                     <a:lnB w="9525" cap="flat" cmpd="sng" algn="ctr">
                       <a:solidFill>
-                        <a:srgbClr val="F8F2C9"/>
+                        <a:srgbClr val="F7F3D4"/>
                       </a:solidFill>
                       <a:prstDash val="solid"/>
                     </a:lnB>
                     <a:solidFill>
-                      <a:srgbClr val="F8F2C9"/>
+                      <a:srgbClr val="F7F3D4"/>
                     </a:solidFill>
                   </a:tcPr>
                 </a:tc>
@@ -6355,25 +6355,25 @@
                   <a:tcPr anchor="ctr" marL="73152" marR="73152">
                     <a:lnL w="9525" cap="flat" cmpd="sng" algn="ctr">
                       <a:solidFill>
-                        <a:srgbClr val="F8F2C9"/>
+                        <a:srgbClr val="F7F3D4"/>
                       </a:solidFill>
                       <a:prstDash val="solid"/>
                     </a:lnL>
                     <a:lnR w="9525" cap="flat" cmpd="sng" algn="ctr">
                       <a:solidFill>
-                        <a:srgbClr val="F8F2C9"/>
+                        <a:srgbClr val="F7F3D4"/>
                       </a:solidFill>
                       <a:prstDash val="solid"/>
                     </a:lnR>
                     <a:lnT w="9525" cap="flat" cmpd="sng" algn="ctr">
                       <a:solidFill>
-                        <a:srgbClr val="F8F2C9"/>
+                        <a:srgbClr val="F7F3D4"/>
                       </a:solidFill>
                       <a:prstDash val="solid"/>
                     </a:lnT>
                     <a:lnB w="9525" cap="flat" cmpd="sng" algn="ctr">
                       <a:solidFill>
-                        <a:srgbClr val="F8F2C9"/>
+                        <a:srgbClr val="F7F3D4"/>
                       </a:solidFill>
                       <a:prstDash val="solid"/>
                     </a:lnB>
@@ -6401,25 +6401,25 @@
                   <a:tcPr anchor="ctr" marL="73152" marR="73152">
                     <a:lnL w="9525" cap="flat" cmpd="sng" algn="ctr">
                       <a:solidFill>
-                        <a:srgbClr val="F8F2C9"/>
+                        <a:srgbClr val="F7F3D4"/>
                       </a:solidFill>
                       <a:prstDash val="solid"/>
                     </a:lnL>
                     <a:lnR w="9525" cap="flat" cmpd="sng" algn="ctr">
                       <a:solidFill>
-                        <a:srgbClr val="F8F2C9"/>
+                        <a:srgbClr val="F7F3D4"/>
                       </a:solidFill>
                       <a:prstDash val="solid"/>
                     </a:lnR>
                     <a:lnT w="9525" cap="flat" cmpd="sng" algn="ctr">
                       <a:solidFill>
-                        <a:srgbClr val="F8F2C9"/>
+                        <a:srgbClr val="F7F3D4"/>
                       </a:solidFill>
                       <a:prstDash val="solid"/>
                     </a:lnT>
                     <a:lnB w="9525" cap="flat" cmpd="sng" algn="ctr">
                       <a:solidFill>
-                        <a:srgbClr val="F8F2C9"/>
+                        <a:srgbClr val="F7F3D4"/>
                       </a:solidFill>
                       <a:prstDash val="solid"/>
                     </a:lnB>
@@ -6447,25 +6447,25 @@
                   <a:tcPr anchor="ctr" marL="73152" marR="73152">
                     <a:lnL w="9525" cap="flat" cmpd="sng" algn="ctr">
                       <a:solidFill>
-                        <a:srgbClr val="F8F2C9"/>
+                        <a:srgbClr val="F7F3D4"/>
                       </a:solidFill>
                       <a:prstDash val="solid"/>
                     </a:lnL>
                     <a:lnR w="9525" cap="flat" cmpd="sng" algn="ctr">
                       <a:solidFill>
-                        <a:srgbClr val="F8F2C9"/>
+                        <a:srgbClr val="F7F3D4"/>
                       </a:solidFill>
                       <a:prstDash val="solid"/>
                     </a:lnR>
                     <a:lnT w="9525" cap="flat" cmpd="sng" algn="ctr">
                       <a:solidFill>
-                        <a:srgbClr val="F8F2C9"/>
+                        <a:srgbClr val="F7F3D4"/>
                       </a:solidFill>
                       <a:prstDash val="solid"/>
                     </a:lnT>
                     <a:lnB w="9525" cap="flat" cmpd="sng" algn="ctr">
                       <a:solidFill>
-                        <a:srgbClr val="F8F2C9"/>
+                        <a:srgbClr val="F7F3D4"/>
                       </a:solidFill>
                       <a:prstDash val="solid"/>
                     </a:lnB>
@@ -6551,7 +6551,7 @@
             <a:r>
               <a:rPr sz="3600" b="1" i="0">
                 <a:solidFill>
-                  <a:srgbClr val="605610"/>
+                  <a:srgbClr val="72671D"/>
                 </a:solidFill>
               </a:rPr>
               <a:t>감사합니다</a:t>
@@ -6589,7 +6589,7 @@
             <a:r>
               <a:rPr sz="1700" b="0" i="1">
                 <a:solidFill>
-                  <a:srgbClr val="605610"/>
+                  <a:srgbClr val="72671D"/>
                 </a:solidFill>
               </a:rPr>
               <a:t>끝까지 들어 주셔서 고맙습니다</a:t>
@@ -6654,34 +6654,34 @@
         <a:sysClr val="window" lastClr="FFFFFF"/>
       </a:lt1>
       <a:dk2>
-        <a:srgbClr val="605610"/>
+        <a:srgbClr val="72671D"/>
       </a:dk2>
       <a:lt2>
-        <a:srgbClr val="FCFAED"/>
+        <a:srgbClr val="FCFBF3"/>
       </a:lt2>
       <a:accent1>
-        <a:srgbClr val="B8A41E"/>
+        <a:srgbClr val="DFC93A"/>
       </a:accent1>
       <a:accent2>
-        <a:srgbClr val="3B7191"/>
+        <a:srgbClr val="339941"/>
       </a:accent2>
       <a:accent3>
-        <a:srgbClr val="605610"/>
+        <a:srgbClr val="72671D"/>
       </a:accent3>
       <a:accent4>
-        <a:srgbClr val="F8F2C9"/>
+        <a:srgbClr val="F7F3D4"/>
       </a:accent4>
       <a:accent5>
-        <a:srgbClr val="7A8A58"/>
+        <a:srgbClr val="89B13E"/>
       </a:accent5>
       <a:accent6>
-        <a:srgbClr val="A09A70"/>
+        <a:srgbClr val="AAA477"/>
       </a:accent6>
       <a:hlink>
-        <a:srgbClr val="B8A41E"/>
+        <a:srgbClr val="DFC93A"/>
       </a:hlink>
       <a:folHlink>
-        <a:srgbClr val="605610"/>
+        <a:srgbClr val="72671D"/>
       </a:folHlink>
     </a:clrScheme>
     <a:fontScheme name="Office">
